--- a/BackMarket_Portfolio_PPT.pptx
+++ b/BackMarket_Portfolio_PPT.pptx
@@ -2995,7 +2995,7 @@
     <p:bg>
       <p:bgPr>
         <a:solidFill>
-          <a:srgbClr val="1A1A2E"/>
+          <a:srgbClr val="1B2340"/>
         </a:solidFill>
         <a:effectLst/>
       </p:bgPr>
@@ -3029,11 +3029,11 @@
             <a:avLst/>
           </a:prstGeom>
           <a:solidFill>
-            <a:srgbClr val="00B67A"/>
+            <a:srgbClr val="C8F135"/>
           </a:solidFill>
           <a:ln w="12700">
             <a:solidFill>
-              <a:srgbClr val="00B67A"/>
+              <a:srgbClr val="C8F135"/>
             </a:solidFill>
             <a:prstDash val="solid"/>
           </a:ln>
@@ -3046,74 +3046,30 @@
           </a:p>
         </p:txBody>
       </p:sp>
-      <p:sp>
-        <p:nvSpPr>
-          <p:cNvPr id="3" name="Shape 1"/>
-          <p:cNvSpPr/>
-          <p:nvPr/>
-        </p:nvSpPr>
-        <p:spPr>
-          <a:xfrm>
-            <a:off x="411480" y="365760"/>
-            <a:ext cx="2011680" cy="502920"/>
-          </a:xfrm>
-          <a:prstGeom prst="rect">
-            <a:avLst/>
-          </a:prstGeom>
-          <a:solidFill>
-            <a:srgbClr val="00B67A"/>
-          </a:solidFill>
-          <a:ln w="12700">
-            <a:solidFill>
-              <a:srgbClr val="00B67A"/>
-            </a:solidFill>
-            <a:prstDash val="solid"/>
-          </a:ln>
-        </p:spPr>
-        <p:txBody>
-          <a:bodyPr/>
-          <a:lstStyle/>
-          <a:p>
-            <a:endParaRPr lang="en-US"/>
-          </a:p>
-        </p:txBody>
-      </p:sp>
-      <p:sp>
-        <p:nvSpPr>
-          <p:cNvPr id="4" name="Text 2"/>
-          <p:cNvSpPr/>
-          <p:nvPr/>
-        </p:nvSpPr>
-        <p:spPr>
-          <a:xfrm>
-            <a:off x="411480" y="365760"/>
-            <a:ext cx="2011680" cy="502920"/>
-          </a:xfrm>
-          <a:prstGeom prst="rect">
-            <a:avLst/>
-          </a:prstGeom>
-          <a:noFill/>
-          <a:ln/>
-        </p:spPr>
-        <p:txBody>
-          <a:bodyPr wrap="square" lIns="0" tIns="0" rIns="0" bIns="0" rtlCol="0" anchor="ctr"/>
-          <a:lstStyle/>
-          <a:p>
-            <a:pPr marL="0" indent="0" algn="ctr">
-              <a:buNone/>
-            </a:pPr>
-            <a:r>
-              <a:rPr lang="en-US" sz="1100" b="1" dirty="0">
-                <a:solidFill>
-                  <a:srgbClr val="FFFFFF"/>
-                </a:solidFill>
-              </a:rPr>
-              <a:t>BACK MARKET</a:t>
-            </a:r>
-            <a:endParaRPr lang="en-US" sz="1100" dirty="0"/>
-          </a:p>
-        </p:txBody>
-      </p:sp>
+      <p:pic>
+        <p:nvPicPr>
+          <p:cNvPr id="3" name="BackMarket Logo"/>
+          <p:cNvPicPr>
+            <a:picLocks noChangeAspect="1"/>
+          </p:cNvPicPr>
+          <p:nvPr/>
+        </p:nvPicPr>
+        <p:blipFill>
+          <a:blip r:embed="rId3"/>
+          <a:stretch>
+            <a:fillRect/>
+          </a:stretch>
+        </p:blipFill>
+        <p:spPr>
+          <a:xfrm>
+            <a:off x="320000" y="280000"/>
+            <a:ext cx="1060000" cy="596250"/>
+          </a:xfrm>
+          <a:prstGeom prst="rect">
+            <a:avLst/>
+          </a:prstGeom>
+        </p:spPr>
+      </p:pic>
       <p:sp>
         <p:nvSpPr>
           <p:cNvPr id="5" name="Text 3"/>
@@ -3180,7 +3136,7 @@
             <a:r>
               <a:rPr lang="en-US" sz="4000" b="1" dirty="0">
                 <a:solidFill>
-                  <a:srgbClr val="00B67A"/>
+                  <a:srgbClr val="C8F135"/>
                 </a:solidFill>
                 <a:latin typeface="Calibri" pitchFamily="34" charset="0"/>
                 <a:ea typeface="Calibri" pitchFamily="34" charset="-122"/>
@@ -3246,11 +3202,11 @@
             <a:avLst/>
           </a:prstGeom>
           <a:solidFill>
-            <a:srgbClr val="00B67A"/>
+            <a:srgbClr val="C8F135"/>
           </a:solidFill>
           <a:ln w="12700">
             <a:solidFill>
-              <a:srgbClr val="00B67A"/>
+              <a:srgbClr val="C8F135"/>
             </a:solidFill>
             <a:prstDash val="solid"/>
           </a:ln>
@@ -3290,7 +3246,7 @@
             <a:r>
               <a:rPr lang="en-US" sz="1300" b="1" dirty="0">
                 <a:solidFill>
-                  <a:srgbClr val="00B67A"/>
+                  <a:srgbClr val="C8F135"/>
                 </a:solidFill>
                 <a:latin typeface="Calibri" pitchFamily="34" charset="0"/>
                 <a:ea typeface="Calibri" pitchFamily="34" charset="-122"/>
@@ -3340,7 +3296,7 @@
             <a:r>
               <a:rPr lang="en-US" sz="1300" b="1" dirty="0">
                 <a:solidFill>
-                  <a:srgbClr val="00B67A"/>
+                  <a:srgbClr val="C8F135"/>
                 </a:solidFill>
                 <a:latin typeface="Calibri" pitchFamily="34" charset="0"/>
                 <a:ea typeface="Calibri" pitchFamily="34" charset="-122"/>
@@ -3390,7 +3346,7 @@
             <a:r>
               <a:rPr lang="en-US" sz="1300" b="1" dirty="0">
                 <a:solidFill>
-                  <a:srgbClr val="00B67A"/>
+                  <a:srgbClr val="C8F135"/>
                 </a:solidFill>
                 <a:latin typeface="Calibri" pitchFamily="34" charset="0"/>
                 <a:ea typeface="Calibri" pitchFamily="34" charset="-122"/>
@@ -3461,7 +3417,7 @@
             <a:avLst/>
           </a:prstGeom>
           <a:solidFill>
-            <a:srgbClr val="1A1A2E"/>
+            <a:srgbClr val="1B2340"/>
           </a:solidFill>
           <a:ln>
             <a:noFill/>
@@ -3505,7 +3461,7 @@
             <a:avLst/>
           </a:prstGeom>
           <a:solidFill>
-            <a:srgbClr val="00B67A"/>
+            <a:srgbClr val="1B6B3A"/>
           </a:solidFill>
           <a:ln>
             <a:noFill/>
@@ -3584,7 +3540,7 @@
             <a:avLst/>
           </a:prstGeom>
           <a:solidFill>
-            <a:srgbClr val="00B67A"/>
+            <a:srgbClr val="1B6B3A"/>
           </a:solidFill>
           <a:ln>
             <a:noFill/>
@@ -3693,7 +3649,7 @@
             <a:avLst/>
           </a:prstGeom>
           <a:solidFill>
-            <a:srgbClr val="1A1A2E"/>
+            <a:srgbClr val="1B2340"/>
           </a:solidFill>
           <a:ln>
             <a:noFill/>
@@ -3737,7 +3693,7 @@
             <a:avLst/>
           </a:prstGeom>
           <a:solidFill>
-            <a:srgbClr val="00B67A"/>
+            <a:srgbClr val="1B6B3A"/>
           </a:solidFill>
           <a:ln>
             <a:noFill/>
@@ -3816,7 +3772,7 @@
             <a:avLst/>
           </a:prstGeom>
           <a:solidFill>
-            <a:srgbClr val="00B67A"/>
+            <a:srgbClr val="1B6B3A"/>
           </a:solidFill>
           <a:ln>
             <a:noFill/>
@@ -3925,7 +3881,7 @@
             <a:avLst/>
           </a:prstGeom>
           <a:solidFill>
-            <a:srgbClr val="1A1A2E"/>
+            <a:srgbClr val="1B2340"/>
           </a:solidFill>
           <a:ln>
             <a:noFill/>
@@ -3969,7 +3925,7 @@
             <a:avLst/>
           </a:prstGeom>
           <a:solidFill>
-            <a:srgbClr val="00B67A"/>
+            <a:srgbClr val="1B6B3A"/>
           </a:solidFill>
           <a:ln>
             <a:noFill/>
@@ -4048,7 +4004,7 @@
             <a:avLst/>
           </a:prstGeom>
           <a:solidFill>
-            <a:srgbClr val="00B67A"/>
+            <a:srgbClr val="1B6B3A"/>
           </a:solidFill>
           <a:ln>
             <a:noFill/>
@@ -4157,11 +4113,11 @@
             <a:avLst/>
           </a:prstGeom>
           <a:solidFill>
-            <a:srgbClr val="1A1A2E"/>
+            <a:srgbClr val="1B2340"/>
           </a:solidFill>
           <a:ln w="12700">
             <a:solidFill>
-              <a:srgbClr val="1A1A2E"/>
+              <a:srgbClr val="1B2340"/>
             </a:solidFill>
             <a:prstDash val="solid"/>
           </a:ln>
@@ -4189,11 +4145,11 @@
             <a:avLst/>
           </a:prstGeom>
           <a:solidFill>
-            <a:srgbClr val="00B67A"/>
+            <a:srgbClr val="1B6B3A"/>
           </a:solidFill>
           <a:ln w="12700">
             <a:solidFill>
-              <a:srgbClr val="00B67A"/>
+              <a:srgbClr val="1B6B3A"/>
             </a:solidFill>
             <a:prstDash val="solid"/>
           </a:ln>
@@ -4299,11 +4255,11 @@
             <a:avLst/>
           </a:prstGeom>
           <a:solidFill>
-            <a:srgbClr val="00B67A"/>
+            <a:srgbClr val="1B6B3A"/>
           </a:solidFill>
           <a:ln w="12700">
             <a:solidFill>
-              <a:srgbClr val="00B67A"/>
+              <a:srgbClr val="1B6B3A"/>
             </a:solidFill>
             <a:prstDash val="solid"/>
           </a:ln>
@@ -4331,11 +4287,11 @@
             <a:avLst/>
           </a:prstGeom>
           <a:solidFill>
-            <a:srgbClr val="00B67A"/>
+            <a:srgbClr val="1B6B3A"/>
           </a:solidFill>
           <a:ln w="12700">
             <a:solidFill>
-              <a:srgbClr val="00B67A"/>
+              <a:srgbClr val="1B6B3A"/>
             </a:solidFill>
             <a:prstDash val="solid"/>
           </a:ln>
@@ -5163,7 +5119,7 @@
     <p:bg>
       <p:bgPr>
         <a:solidFill>
-          <a:srgbClr val="1A1A2E"/>
+          <a:srgbClr val="1B2340"/>
         </a:solidFill>
         <a:effectLst/>
       </p:bgPr>
@@ -5197,11 +5153,11 @@
             <a:avLst/>
           </a:prstGeom>
           <a:solidFill>
-            <a:srgbClr val="00B67A"/>
+            <a:srgbClr val="C8F135"/>
           </a:solidFill>
           <a:ln w="12700">
             <a:solidFill>
-              <a:srgbClr val="00B67A"/>
+              <a:srgbClr val="C8F135"/>
             </a:solidFill>
             <a:prstDash val="solid"/>
           </a:ln>
@@ -5268,11 +5224,11 @@
             <a:avLst/>
           </a:prstGeom>
           <a:solidFill>
-            <a:srgbClr val="00B67A"/>
+            <a:srgbClr val="C8F135"/>
           </a:solidFill>
           <a:ln w="12700">
             <a:solidFill>
-              <a:srgbClr val="00B67A"/>
+              <a:srgbClr val="C8F135"/>
             </a:solidFill>
             <a:prstDash val="solid"/>
           </a:ln>
@@ -5336,11 +5292,11 @@
             <a:avLst/>
           </a:prstGeom>
           <a:solidFill>
-            <a:srgbClr val="00B67A"/>
+            <a:srgbClr val="C8F135"/>
           </a:solidFill>
           <a:ln w="12700">
             <a:solidFill>
-              <a:srgbClr val="00B67A"/>
+              <a:srgbClr val="C8F135"/>
             </a:solidFill>
             <a:prstDash val="solid"/>
           </a:ln>
@@ -5907,7 +5863,7 @@
     <p:bg>
       <p:bgPr>
         <a:solidFill>
-          <a:srgbClr val="1A1A2E"/>
+          <a:srgbClr val="1B2340"/>
         </a:solidFill>
         <a:effectLst/>
       </p:bgPr>
@@ -5941,11 +5897,11 @@
             <a:avLst/>
           </a:prstGeom>
           <a:solidFill>
-            <a:srgbClr val="00B67A"/>
+            <a:srgbClr val="C8F135"/>
           </a:solidFill>
           <a:ln w="12700">
             <a:solidFill>
-              <a:srgbClr val="00B67A"/>
+              <a:srgbClr val="C8F135"/>
             </a:solidFill>
             <a:prstDash val="solid"/>
           </a:ln>
@@ -5973,11 +5929,11 @@
             <a:avLst/>
           </a:prstGeom>
           <a:solidFill>
-            <a:srgbClr val="00B67A"/>
+            <a:srgbClr val="C8F135"/>
           </a:solidFill>
           <a:ln w="12700">
             <a:solidFill>
-              <a:srgbClr val="00B67A"/>
+              <a:srgbClr val="C8F135"/>
             </a:solidFill>
             <a:prstDash val="solid"/>
           </a:ln>
@@ -6044,11 +6000,11 @@
             <a:avLst/>
           </a:prstGeom>
           <a:solidFill>
-            <a:srgbClr val="00B67A"/>
+            <a:srgbClr val="C8F135"/>
           </a:solidFill>
           <a:ln w="12700">
             <a:solidFill>
-              <a:srgbClr val="00B67A"/>
+              <a:srgbClr val="C8F135"/>
             </a:solidFill>
             <a:prstDash val="solid"/>
           </a:ln>
@@ -6088,7 +6044,7 @@
             <a:r>
               <a:rPr lang="en-US" sz="1800" b="1" dirty="0">
                 <a:solidFill>
-                  <a:srgbClr val="00B67A"/>
+                  <a:srgbClr val="C8F135"/>
                 </a:solidFill>
                 <a:latin typeface="Calibri" pitchFamily="34" charset="0"/>
                 <a:ea typeface="Calibri" pitchFamily="34" charset="-122"/>
@@ -6099,7 +6055,7 @@
             <a:r>
               <a:rPr lang="en-US" b="1" dirty="0">
                 <a:solidFill>
-                  <a:srgbClr val="00B67A"/>
+                  <a:srgbClr val="C8F135"/>
                 </a:solidFill>
                 <a:latin typeface="Calibri" pitchFamily="34" charset="0"/>
                 <a:ea typeface="Calibri" pitchFamily="34" charset="-122"/>
@@ -6165,11 +6121,11 @@
             <a:avLst/>
           </a:prstGeom>
           <a:solidFill>
-            <a:srgbClr val="00B67A"/>
+            <a:srgbClr val="C8F135"/>
           </a:solidFill>
           <a:ln w="12700">
             <a:solidFill>
-              <a:srgbClr val="00B67A"/>
+              <a:srgbClr val="C8F135"/>
             </a:solidFill>
             <a:prstDash val="solid"/>
           </a:ln>
@@ -6236,11 +6192,11 @@
             <a:avLst/>
           </a:prstGeom>
           <a:solidFill>
-            <a:srgbClr val="00B67A"/>
+            <a:srgbClr val="C8F135"/>
           </a:solidFill>
           <a:ln w="12700">
             <a:solidFill>
-              <a:srgbClr val="00B67A"/>
+              <a:srgbClr val="C8F135"/>
             </a:solidFill>
             <a:prstDash val="solid"/>
           </a:ln>
@@ -6307,11 +6263,11 @@
             <a:avLst/>
           </a:prstGeom>
           <a:solidFill>
-            <a:srgbClr val="00B67A"/>
+            <a:srgbClr val="C8F135"/>
           </a:solidFill>
           <a:ln w="12700">
             <a:solidFill>
-              <a:srgbClr val="00B67A"/>
+              <a:srgbClr val="C8F135"/>
             </a:solidFill>
             <a:prstDash val="solid"/>
           </a:ln>
@@ -6378,11 +6334,11 @@
             <a:avLst/>
           </a:prstGeom>
           <a:solidFill>
-            <a:srgbClr val="00B67A"/>
+            <a:srgbClr val="C8F135"/>
           </a:solidFill>
           <a:ln w="12700">
             <a:solidFill>
-              <a:srgbClr val="00B67A"/>
+              <a:srgbClr val="C8F135"/>
             </a:solidFill>
             <a:prstDash val="solid"/>
           </a:ln>
@@ -6521,11 +6477,11 @@
             <a:avLst/>
           </a:prstGeom>
           <a:solidFill>
-            <a:srgbClr val="1A1A2E"/>
+            <a:srgbClr val="1B2340"/>
           </a:solidFill>
           <a:ln w="12700">
             <a:solidFill>
-              <a:srgbClr val="1A1A2E"/>
+              <a:srgbClr val="1B2340"/>
             </a:solidFill>
             <a:prstDash val="solid"/>
           </a:ln>
@@ -6553,11 +6509,11 @@
             <a:avLst/>
           </a:prstGeom>
           <a:solidFill>
-            <a:srgbClr val="00B67A"/>
+            <a:srgbClr val="1B6B3A"/>
           </a:solidFill>
           <a:ln w="12700">
             <a:solidFill>
-              <a:srgbClr val="00B67A"/>
+              <a:srgbClr val="1B6B3A"/>
             </a:solidFill>
             <a:prstDash val="solid"/>
           </a:ln>
@@ -6663,11 +6619,11 @@
             <a:avLst/>
           </a:prstGeom>
           <a:solidFill>
-            <a:srgbClr val="00B67A"/>
+            <a:srgbClr val="1B6B3A"/>
           </a:solidFill>
           <a:ln w="12700">
             <a:solidFill>
-              <a:srgbClr val="00B67A"/>
+              <a:srgbClr val="1B6B3A"/>
             </a:solidFill>
             <a:prstDash val="solid"/>
           </a:ln>
@@ -6832,11 +6788,11 @@
             <a:avLst/>
           </a:prstGeom>
           <a:solidFill>
-            <a:srgbClr val="1A1A2E"/>
+            <a:srgbClr val="1B2340"/>
           </a:solidFill>
           <a:ln w="12700">
             <a:solidFill>
-              <a:srgbClr val="1A1A2E"/>
+              <a:srgbClr val="1B2340"/>
             </a:solidFill>
             <a:prstDash val="solid"/>
           </a:ln>
@@ -6900,11 +6856,11 @@
             <a:avLst/>
           </a:prstGeom>
           <a:solidFill>
-            <a:srgbClr val="00B67A"/>
+            <a:srgbClr val="1B6B3A"/>
           </a:solidFill>
           <a:ln w="12700">
             <a:solidFill>
-              <a:srgbClr val="00B67A"/>
+              <a:srgbClr val="1B6B3A"/>
             </a:solidFill>
             <a:prstDash val="solid"/>
           </a:ln>
@@ -7007,11 +6963,11 @@
             <a:avLst/>
           </a:prstGeom>
           <a:solidFill>
-            <a:srgbClr val="00B67A"/>
+            <a:srgbClr val="1B6B3A"/>
           </a:solidFill>
           <a:ln w="12700">
             <a:solidFill>
-              <a:srgbClr val="00B67A"/>
+              <a:srgbClr val="1B6B3A"/>
             </a:solidFill>
             <a:prstDash val="solid"/>
           </a:ln>
@@ -7114,11 +7070,11 @@
             <a:avLst/>
           </a:prstGeom>
           <a:solidFill>
-            <a:srgbClr val="00B67A"/>
+            <a:srgbClr val="1B6B3A"/>
           </a:solidFill>
           <a:ln w="12700">
             <a:solidFill>
-              <a:srgbClr val="00B67A"/>
+              <a:srgbClr val="1B6B3A"/>
             </a:solidFill>
             <a:prstDash val="solid"/>
           </a:ln>
@@ -7221,11 +7177,11 @@
             <a:avLst/>
           </a:prstGeom>
           <a:solidFill>
-            <a:srgbClr val="00B67A"/>
+            <a:srgbClr val="1B6B3A"/>
           </a:solidFill>
           <a:ln w="12700">
             <a:solidFill>
-              <a:srgbClr val="00B67A"/>
+              <a:srgbClr val="1B6B3A"/>
             </a:solidFill>
             <a:prstDash val="solid"/>
           </a:ln>
@@ -7328,11 +7284,11 @@
             <a:avLst/>
           </a:prstGeom>
           <a:solidFill>
-            <a:srgbClr val="00B67A"/>
+            <a:srgbClr val="1B6B3A"/>
           </a:solidFill>
           <a:ln w="12700">
             <a:solidFill>
-              <a:srgbClr val="00B67A"/>
+              <a:srgbClr val="1B6B3A"/>
             </a:solidFill>
             <a:prstDash val="solid"/>
           </a:ln>
@@ -7504,11 +7460,11 @@
             <a:avLst/>
           </a:prstGeom>
           <a:solidFill>
-            <a:srgbClr val="1A1A2E"/>
+            <a:srgbClr val="1B2340"/>
           </a:solidFill>
           <a:ln w="12700">
             <a:solidFill>
-              <a:srgbClr val="1A1A2E"/>
+              <a:srgbClr val="1B2340"/>
             </a:solidFill>
             <a:prstDash val="solid"/>
           </a:ln>
@@ -7536,11 +7492,11 @@
             <a:avLst/>
           </a:prstGeom>
           <a:solidFill>
-            <a:srgbClr val="00B67A"/>
+            <a:srgbClr val="1B6B3A"/>
           </a:solidFill>
           <a:ln w="12700">
             <a:solidFill>
-              <a:srgbClr val="00B67A"/>
+              <a:srgbClr val="1B6B3A"/>
             </a:solidFill>
             <a:prstDash val="solid"/>
           </a:ln>
@@ -7607,11 +7563,11 @@
             <a:avLst/>
           </a:prstGeom>
           <a:solidFill>
-            <a:srgbClr val="00B67A"/>
+            <a:srgbClr val="1B6B3A"/>
           </a:solidFill>
           <a:ln w="12700">
             <a:solidFill>
-              <a:srgbClr val="00B67A"/>
+              <a:srgbClr val="1B6B3A"/>
             </a:solidFill>
             <a:prstDash val="solid"/>
           </a:ln>
@@ -7714,11 +7670,11 @@
             <a:avLst/>
           </a:prstGeom>
           <a:solidFill>
-            <a:srgbClr val="00B67A"/>
+            <a:srgbClr val="1B6B3A"/>
           </a:solidFill>
           <a:ln w="12700">
             <a:solidFill>
-              <a:srgbClr val="00B67A"/>
+              <a:srgbClr val="1B6B3A"/>
             </a:solidFill>
             <a:prstDash val="solid"/>
           </a:ln>
@@ -7758,7 +7714,7 @@
             <a:r>
               <a:rPr lang="en-US" sz="2200" b="1" dirty="0">
                 <a:solidFill>
-                  <a:srgbClr val="00B67A"/>
+                  <a:srgbClr val="1B6B3A"/>
                 </a:solidFill>
                 <a:latin typeface="Calibri" pitchFamily="34" charset="0"/>
                 <a:ea typeface="Calibri" pitchFamily="34" charset="-122"/>
@@ -7863,11 +7819,11 @@
             <a:avLst/>
           </a:prstGeom>
           <a:solidFill>
-            <a:srgbClr val="00B67A"/>
+            <a:srgbClr val="1B6B3A"/>
           </a:solidFill>
           <a:ln w="12700">
             <a:solidFill>
-              <a:srgbClr val="00B67A"/>
+              <a:srgbClr val="1B6B3A"/>
             </a:solidFill>
             <a:prstDash val="solid"/>
           </a:ln>
@@ -7907,7 +7863,7 @@
             <a:r>
               <a:rPr lang="en-US" sz="2200" b="1" dirty="0">
                 <a:solidFill>
-                  <a:srgbClr val="00B67A"/>
+                  <a:srgbClr val="1B6B3A"/>
                 </a:solidFill>
                 <a:latin typeface="Calibri" pitchFamily="34" charset="0"/>
                 <a:ea typeface="Calibri" pitchFamily="34" charset="-122"/>
@@ -8012,11 +7968,11 @@
             <a:avLst/>
           </a:prstGeom>
           <a:solidFill>
-            <a:srgbClr val="00B67A"/>
+            <a:srgbClr val="1B6B3A"/>
           </a:solidFill>
           <a:ln w="12700">
             <a:solidFill>
-              <a:srgbClr val="00B67A"/>
+              <a:srgbClr val="1B6B3A"/>
             </a:solidFill>
             <a:prstDash val="solid"/>
           </a:ln>
@@ -8056,7 +8012,7 @@
             <a:r>
               <a:rPr lang="en-US" sz="2200" b="1" dirty="0">
                 <a:solidFill>
-                  <a:srgbClr val="00B67A"/>
+                  <a:srgbClr val="1B6B3A"/>
                 </a:solidFill>
                 <a:latin typeface="Calibri" pitchFamily="34" charset="0"/>
                 <a:ea typeface="Calibri" pitchFamily="34" charset="-122"/>
@@ -8245,11 +8201,11 @@
             <a:avLst/>
           </a:prstGeom>
           <a:solidFill>
-            <a:srgbClr val="00B67A"/>
+            <a:srgbClr val="1B6B3A"/>
           </a:solidFill>
           <a:ln w="12700">
             <a:solidFill>
-              <a:srgbClr val="00B67A"/>
+              <a:srgbClr val="1B6B3A"/>
             </a:solidFill>
             <a:prstDash val="solid"/>
           </a:ln>
@@ -8316,11 +8272,11 @@
             <a:avLst/>
           </a:prstGeom>
           <a:solidFill>
-            <a:srgbClr val="00B67A"/>
+            <a:srgbClr val="1B6B3A"/>
           </a:solidFill>
           <a:ln w="12700">
             <a:solidFill>
-              <a:srgbClr val="00B67A"/>
+              <a:srgbClr val="1B6B3A"/>
             </a:solidFill>
             <a:prstDash val="solid"/>
           </a:ln>
@@ -8387,11 +8343,11 @@
             <a:avLst/>
           </a:prstGeom>
           <a:solidFill>
-            <a:srgbClr val="00B67A"/>
+            <a:srgbClr val="1B6B3A"/>
           </a:solidFill>
           <a:ln w="12700">
             <a:solidFill>
-              <a:srgbClr val="00B67A"/>
+              <a:srgbClr val="1B6B3A"/>
             </a:solidFill>
             <a:prstDash val="solid"/>
           </a:ln>
@@ -8458,11 +8414,11 @@
             <a:avLst/>
           </a:prstGeom>
           <a:solidFill>
-            <a:srgbClr val="00B67A"/>
+            <a:srgbClr val="1B6B3A"/>
           </a:solidFill>
           <a:ln w="12700">
             <a:solidFill>
-              <a:srgbClr val="00B67A"/>
+              <a:srgbClr val="1B6B3A"/>
             </a:solidFill>
             <a:prstDash val="solid"/>
           </a:ln>
@@ -8533,7 +8489,7 @@
           </a:solidFill>
           <a:ln w="12700">
             <a:solidFill>
-              <a:srgbClr val="00B67A"/>
+              <a:srgbClr val="1B6B3A"/>
             </a:solidFill>
             <a:prstDash val="solid"/>
           </a:ln>
@@ -8669,11 +8625,11 @@
             <a:avLst/>
           </a:prstGeom>
           <a:solidFill>
-            <a:srgbClr val="1A1A2E"/>
+            <a:srgbClr val="1B2340"/>
           </a:solidFill>
           <a:ln w="12700">
             <a:solidFill>
-              <a:srgbClr val="1A1A2E"/>
+              <a:srgbClr val="1B2340"/>
             </a:solidFill>
             <a:prstDash val="solid"/>
           </a:ln>
@@ -8701,11 +8657,11 @@
             <a:avLst/>
           </a:prstGeom>
           <a:solidFill>
-            <a:srgbClr val="00B67A"/>
+            <a:srgbClr val="1B6B3A"/>
           </a:solidFill>
           <a:ln w="12700">
             <a:solidFill>
-              <a:srgbClr val="00B67A"/>
+              <a:srgbClr val="1B6B3A"/>
             </a:solidFill>
             <a:prstDash val="solid"/>
           </a:ln>
@@ -8772,11 +8728,11 @@
             <a:avLst/>
           </a:prstGeom>
           <a:solidFill>
-            <a:srgbClr val="00B67A"/>
+            <a:srgbClr val="1B6B3A"/>
           </a:solidFill>
           <a:ln w="12700">
             <a:solidFill>
-              <a:srgbClr val="00B67A"/>
+              <a:srgbClr val="1B6B3A"/>
             </a:solidFill>
             <a:prstDash val="solid"/>
           </a:ln>
@@ -8895,11 +8851,11 @@
             <a:avLst/>
           </a:prstGeom>
           <a:solidFill>
-            <a:srgbClr val="00B67A"/>
+            <a:srgbClr val="1B6B3A"/>
           </a:solidFill>
           <a:ln w="12700">
             <a:solidFill>
-              <a:srgbClr val="00B67A"/>
+              <a:srgbClr val="1B6B3A"/>
             </a:solidFill>
             <a:prstDash val="solid"/>
           </a:ln>
@@ -8978,7 +8934,7 @@
             <a:r>
               <a:rPr lang="en-US" sz="1000" b="1" dirty="0">
                 <a:solidFill>
-                  <a:srgbClr val="00B67A"/>
+                  <a:srgbClr val="1B6B3A"/>
                 </a:solidFill>
                 <a:latin typeface="Calibri" pitchFamily="34" charset="0"/>
                 <a:ea typeface="Calibri" pitchFamily="34" charset="-122"/>
@@ -9100,11 +9056,11 @@
             <a:avLst/>
           </a:prstGeom>
           <a:solidFill>
-            <a:srgbClr val="00B67A"/>
+            <a:srgbClr val="1B6B3A"/>
           </a:solidFill>
           <a:ln w="12700">
             <a:solidFill>
-              <a:srgbClr val="00B67A"/>
+              <a:srgbClr val="1B6B3A"/>
             </a:solidFill>
             <a:prstDash val="solid"/>
           </a:ln>
@@ -9183,7 +9139,7 @@
             <a:r>
               <a:rPr lang="en-US" sz="1000" b="1" dirty="0">
                 <a:solidFill>
-                  <a:srgbClr val="00B67A"/>
+                  <a:srgbClr val="1B6B3A"/>
                 </a:solidFill>
                 <a:latin typeface="Calibri" pitchFamily="34" charset="0"/>
                 <a:ea typeface="Calibri" pitchFamily="34" charset="-122"/>
@@ -9305,11 +9261,11 @@
             <a:avLst/>
           </a:prstGeom>
           <a:solidFill>
-            <a:srgbClr val="00B67A"/>
+            <a:srgbClr val="1B6B3A"/>
           </a:solidFill>
           <a:ln w="12700">
             <a:solidFill>
-              <a:srgbClr val="00B67A"/>
+              <a:srgbClr val="1B6B3A"/>
             </a:solidFill>
             <a:prstDash val="solid"/>
           </a:ln>
@@ -9388,7 +9344,7 @@
             <a:r>
               <a:rPr lang="en-US" sz="1000" b="1" dirty="0">
                 <a:solidFill>
-                  <a:srgbClr val="00B67A"/>
+                  <a:srgbClr val="1B6B3A"/>
                 </a:solidFill>
                 <a:latin typeface="Calibri" pitchFamily="34" charset="0"/>
                 <a:ea typeface="Calibri" pitchFamily="34" charset="-122"/>
@@ -9527,11 +9483,11 @@
             <a:avLst/>
           </a:prstGeom>
           <a:solidFill>
-            <a:srgbClr val="00B67A"/>
+            <a:srgbClr val="1B6B3A"/>
           </a:solidFill>
           <a:ln w="12700">
             <a:solidFill>
-              <a:srgbClr val="00B67A"/>
+              <a:srgbClr val="1B6B3A"/>
             </a:solidFill>
             <a:prstDash val="solid"/>
           </a:ln>
@@ -9610,7 +9566,7 @@
             <a:r>
               <a:rPr lang="en-US" sz="1000" b="1" dirty="0">
                 <a:solidFill>
-                  <a:srgbClr val="00B67A"/>
+                  <a:srgbClr val="1B6B3A"/>
                 </a:solidFill>
                 <a:latin typeface="Calibri" pitchFamily="34" charset="0"/>
                 <a:ea typeface="Calibri" pitchFamily="34" charset="-122"/>
@@ -9697,7 +9653,7 @@
           </a:solidFill>
           <a:ln w="12700">
             <a:solidFill>
-              <a:srgbClr val="00B67A"/>
+              <a:srgbClr val="1B6B3A"/>
             </a:solidFill>
             <a:prstDash val="solid"/>
           </a:ln>
@@ -9833,11 +9789,11 @@
             <a:avLst/>
           </a:prstGeom>
           <a:solidFill>
-            <a:srgbClr val="1A1A2E"/>
+            <a:srgbClr val="1B2340"/>
           </a:solidFill>
           <a:ln w="12700">
             <a:solidFill>
-              <a:srgbClr val="1A1A2E"/>
+              <a:srgbClr val="1B2340"/>
             </a:solidFill>
             <a:prstDash val="solid"/>
           </a:ln>
@@ -11035,11 +10991,11 @@
             <a:avLst/>
           </a:prstGeom>
           <a:solidFill>
-            <a:srgbClr val="1A1A2E"/>
+            <a:srgbClr val="1B2340"/>
           </a:solidFill>
           <a:ln w="12700">
             <a:solidFill>
-              <a:srgbClr val="1A1A2E"/>
+              <a:srgbClr val="1B2340"/>
             </a:solidFill>
             <a:prstDash val="solid"/>
           </a:ln>
@@ -11330,7 +11286,7 @@
                       <a:tailEnd type="none" w="med" len="med"/>
                     </a:lnB>
                     <a:solidFill>
-                      <a:srgbClr val="1A1A2E"/>
+                      <a:srgbClr val="1B2340"/>
                     </a:solidFill>
                   </a:tcPr>
                 </a:tc>
@@ -11398,7 +11354,7 @@
                       <a:tailEnd type="none" w="med" len="med"/>
                     </a:lnB>
                     <a:solidFill>
-                      <a:srgbClr val="1A1A2E"/>
+                      <a:srgbClr val="1B2340"/>
                     </a:solidFill>
                   </a:tcPr>
                 </a:tc>
@@ -11466,7 +11422,7 @@
                       <a:tailEnd type="none" w="med" len="med"/>
                     </a:lnB>
                     <a:solidFill>
-                      <a:srgbClr val="1A1A2E"/>
+                      <a:srgbClr val="1B2340"/>
                     </a:solidFill>
                   </a:tcPr>
                 </a:tc>
@@ -11534,7 +11490,7 @@
                       <a:tailEnd type="none" w="med" len="med"/>
                     </a:lnB>
                     <a:solidFill>
-                      <a:srgbClr val="1A1A2E"/>
+                      <a:srgbClr val="1B2340"/>
                     </a:solidFill>
                   </a:tcPr>
                 </a:tc>
@@ -13086,7 +13042,7 @@
                       <a:r>
                         <a:rPr lang="en-US" sz="1100" dirty="0">
                           <a:solidFill>
-                            <a:srgbClr val="00B67A"/>
+                            <a:srgbClr val="1B6B3A"/>
                           </a:solidFill>
                           <a:latin typeface="Calibri" pitchFamily="34" charset="0"/>
                           <a:ea typeface="Calibri" pitchFamily="34" charset="-122"/>
@@ -13590,11 +13546,11 @@
             <a:avLst/>
           </a:prstGeom>
           <a:solidFill>
-            <a:srgbClr val="1A1A2E"/>
+            <a:srgbClr val="1B2340"/>
           </a:solidFill>
           <a:ln w="12700">
             <a:solidFill>
-              <a:srgbClr val="1A1A2E"/>
+              <a:srgbClr val="1B2340"/>
             </a:solidFill>
             <a:prstDash val="solid"/>
           </a:ln>
@@ -14254,11 +14210,11 @@
             <a:avLst/>
           </a:prstGeom>
           <a:solidFill>
-            <a:srgbClr val="1A1A2E"/>
+            <a:srgbClr val="1B2340"/>
           </a:solidFill>
           <a:ln w="12700">
             <a:solidFill>
-              <a:srgbClr val="1A1A2E"/>
+              <a:srgbClr val="1B2340"/>
             </a:solidFill>
             <a:prstDash val="solid"/>
           </a:ln>
@@ -14430,7 +14386,7 @@
             <a:avLst/>
           </a:prstGeom>
           <a:solidFill>
-            <a:srgbClr val="1A1A2E"/>
+            <a:srgbClr val="1B2340"/>
           </a:solidFill>
           <a:ln>
             <a:noFill/>
@@ -14474,7 +14430,7 @@
             <a:avLst/>
           </a:prstGeom>
           <a:solidFill>
-            <a:srgbClr val="00B67A"/>
+            <a:srgbClr val="1B6B3A"/>
           </a:solidFill>
           <a:ln>
             <a:noFill/>
@@ -14553,7 +14509,7 @@
             <a:avLst/>
           </a:prstGeom>
           <a:solidFill>
-            <a:srgbClr val="00B67A"/>
+            <a:srgbClr val="1B6B3A"/>
           </a:solidFill>
           <a:ln>
             <a:noFill/>
@@ -14662,7 +14618,7 @@
             <a:avLst/>
           </a:prstGeom>
           <a:solidFill>
-            <a:srgbClr val="1A1A2E"/>
+            <a:srgbClr val="1B2340"/>
           </a:solidFill>
           <a:ln>
             <a:noFill/>
@@ -14706,7 +14662,7 @@
             <a:avLst/>
           </a:prstGeom>
           <a:solidFill>
-            <a:srgbClr val="00B67A"/>
+            <a:srgbClr val="1B6B3A"/>
           </a:solidFill>
           <a:ln>
             <a:noFill/>
@@ -14785,7 +14741,7 @@
             <a:avLst/>
           </a:prstGeom>
           <a:solidFill>
-            <a:srgbClr val="00B67A"/>
+            <a:srgbClr val="1B6B3A"/>
           </a:solidFill>
           <a:ln>
             <a:noFill/>
